--- a/main-labs/switching/one-bridge/0110-kathara-lab_one-bridge.pptx
+++ b/main-labs/switching/one-bridge/0110-kathara-lab_one-bridge.pptx
@@ -4474,7 +4474,7 @@
               <a:pPr>
                 <a:defRPr/>
               </a:pPr>
-              <a:t>‹#›</a:t>
+              <a:t>‹N›</a:t>
             </a:fld>
             <a:endParaRPr lang="en-US" altLang="it-IT"/>
           </a:p>
@@ -4852,7 +4852,7 @@
               <a:pPr>
                 <a:defRPr/>
               </a:pPr>
-              <a:t>‹#›</a:t>
+              <a:t>‹N›</a:t>
             </a:fld>
             <a:endParaRPr lang="it-IT" altLang="it-IT"/>
           </a:p>
@@ -5519,7 +5519,7 @@
             </a:pPr>
             <a:r>
               <a:rPr lang="en-US" altLang="it-IT"/>
-              <a:t>last update: Sept  2024</a:t>
+              <a:t>last update: Oct 2026</a:t>
             </a:r>
             <a:endParaRPr lang="it-IT" altLang="it-IT"/>
           </a:p>
@@ -5709,7 +5709,7 @@
             </a:pPr>
             <a:r>
               <a:rPr lang="en-US" altLang="it-IT"/>
-              <a:t>last update: Sept  2024</a:t>
+              <a:t>last update: Oct 2026</a:t>
             </a:r>
             <a:endParaRPr lang="it-IT" altLang="it-IT"/>
           </a:p>
@@ -5845,7 +5845,7 @@
             </a:pPr>
             <a:r>
               <a:rPr lang="en-US" altLang="it-IT"/>
-              <a:t>last update: Sept  2024</a:t>
+              <a:t>last update: Oct 2026</a:t>
             </a:r>
             <a:endParaRPr lang="it-IT" altLang="it-IT"/>
           </a:p>
@@ -6071,7 +6071,7 @@
             </a:pPr>
             <a:r>
               <a:rPr lang="en-US" altLang="it-IT"/>
-              <a:t>last update: Sept  2024</a:t>
+              <a:t>last update: Oct 2026</a:t>
             </a:r>
             <a:endParaRPr lang="it-IT" altLang="it-IT"/>
           </a:p>
@@ -6285,7 +6285,7 @@
             </a:pPr>
             <a:r>
               <a:rPr lang="en-US" altLang="it-IT"/>
-              <a:t>last update: Sept  2024</a:t>
+              <a:t>last update: Oct 2026</a:t>
             </a:r>
             <a:endParaRPr lang="it-IT" altLang="it-IT"/>
           </a:p>
@@ -6583,7 +6583,7 @@
             </a:pPr>
             <a:r>
               <a:rPr lang="en-US" altLang="it-IT"/>
-              <a:t>last update: Sept  2024</a:t>
+              <a:t>last update: Oct 2026</a:t>
             </a:r>
             <a:endParaRPr lang="it-IT" altLang="it-IT"/>
           </a:p>
@@ -6711,7 +6711,7 @@
             </a:pPr>
             <a:r>
               <a:rPr lang="en-US" altLang="it-IT"/>
-              <a:t>last update: Sept  2024</a:t>
+              <a:t>last update: Oct 2026</a:t>
             </a:r>
             <a:endParaRPr lang="it-IT" altLang="it-IT"/>
           </a:p>
@@ -6816,7 +6816,7 @@
             </a:pPr>
             <a:r>
               <a:rPr lang="en-US" altLang="it-IT"/>
-              <a:t>last update: Sept  2024</a:t>
+              <a:t>last update: Oct 2026</a:t>
             </a:r>
             <a:endParaRPr lang="it-IT" altLang="it-IT"/>
           </a:p>
@@ -7103,7 +7103,7 @@
             </a:pPr>
             <a:r>
               <a:rPr lang="en-US" altLang="it-IT"/>
-              <a:t>last update: Sept  2024</a:t>
+              <a:t>last update: Oct 2026</a:t>
             </a:r>
             <a:endParaRPr lang="it-IT" altLang="it-IT"/>
           </a:p>
@@ -7371,7 +7371,7 @@
             </a:pPr>
             <a:r>
               <a:rPr lang="en-US" altLang="it-IT"/>
-              <a:t>last update: Sept  2024</a:t>
+              <a:t>last update: Oct 2026</a:t>
             </a:r>
             <a:endParaRPr lang="it-IT" altLang="it-IT"/>
           </a:p>
@@ -7660,7 +7660,7 @@
             </a:pPr>
             <a:r>
               <a:rPr lang="en-US" altLang="it-IT"/>
-              <a:t>last update: Sept  2024</a:t>
+              <a:t>last update: Oct 2026</a:t>
             </a:r>
             <a:endParaRPr lang="it-IT" altLang="it-IT"/>
           </a:p>
@@ -8437,7 +8437,7 @@
           <p:nvPr>
             <p:extLst>
               <p:ext uri="{D42A27DB-BD31-4B8C-83A1-F6EECF244321}">
-                <p14:modId xmlns:p14="http://schemas.microsoft.com/office/powerpoint/2010/main" val="2329817252"/>
+                <p14:modId xmlns:p14="http://schemas.microsoft.com/office/powerpoint/2010/main" val="3323981446"/>
               </p:ext>
             </p:extLst>
           </p:nvPr>
@@ -8853,7 +8853,7 @@
                           <a:effectLst/>
                           <a:latin typeface="Tahoma" panose="020B0604030504040204" pitchFamily="34" charset="0"/>
                         </a:rPr>
-                        <a:t>2.0</a:t>
+                        <a:t>3.0</a:t>
                       </a:r>
                     </a:p>
                   </a:txBody>
@@ -10879,7 +10879,7 @@
             </a:pPr>
             <a:r>
               <a:rPr lang="en-US" altLang="it-IT"/>
-              <a:t>last update: Sept  2024</a:t>
+              <a:t>last update: Oct 2026</a:t>
             </a:r>
             <a:endParaRPr lang="it-IT" altLang="it-IT"/>
           </a:p>
@@ -12291,7 +12291,7 @@
             </a:pPr>
             <a:r>
               <a:rPr lang="en-US" altLang="it-IT"/>
-              <a:t>last update: Sept  2024</a:t>
+              <a:t>last update: Oct 2026</a:t>
             </a:r>
             <a:endParaRPr lang="it-IT" altLang="it-IT"/>
           </a:p>
@@ -13057,7 +13057,7 @@
             </a:pPr>
             <a:r>
               <a:rPr lang="en-US" altLang="it-IT"/>
-              <a:t>last update: Sept  2024</a:t>
+              <a:t>last update: Oct 2026</a:t>
             </a:r>
             <a:endParaRPr lang="it-IT" altLang="it-IT"/>
           </a:p>
@@ -13241,7 +13241,7 @@
             </a:pPr>
             <a:r>
               <a:rPr lang="en-US" altLang="it-IT"/>
-              <a:t>last update: Sept  2024</a:t>
+              <a:t>last update: Oct 2026</a:t>
             </a:r>
             <a:endParaRPr lang="it-IT" altLang="it-IT"/>
           </a:p>
@@ -14185,7 +14185,7 @@
             </a:pPr>
             <a:r>
               <a:rPr lang="en-US" altLang="it-IT"/>
-              <a:t>last update: Sept  2024</a:t>
+              <a:t>last update: Oct 2026</a:t>
             </a:r>
             <a:endParaRPr lang="it-IT" altLang="it-IT"/>
           </a:p>
@@ -14407,7 +14407,7 @@
             </a:pPr>
             <a:r>
               <a:rPr lang="en-US" altLang="it-IT"/>
-              <a:t>last update: Sept  2024</a:t>
+              <a:t>last update: Oct 2026</a:t>
             </a:r>
             <a:endParaRPr lang="it-IT" altLang="it-IT"/>
           </a:p>
@@ -14571,7 +14571,7 @@
             </a:pPr>
             <a:r>
               <a:rPr lang="en-US" altLang="it-IT"/>
-              <a:t>last update: Sept  2024</a:t>
+              <a:t>last update: Oct 2026</a:t>
             </a:r>
             <a:endParaRPr lang="it-IT" altLang="it-IT"/>
           </a:p>
@@ -15320,7 +15320,7 @@
             </a:pPr>
             <a:r>
               <a:rPr lang="en-US" altLang="it-IT"/>
-              <a:t>last update: Sept  2024</a:t>
+              <a:t>last update: Oct 2026</a:t>
             </a:r>
             <a:endParaRPr lang="it-IT" altLang="it-IT"/>
           </a:p>
@@ -16814,7 +16814,7 @@
             </a:pPr>
             <a:r>
               <a:rPr lang="en-US" altLang="it-IT"/>
-              <a:t>last update: Sept  2024</a:t>
+              <a:t>last update: Oct 2026</a:t>
             </a:r>
             <a:endParaRPr lang="it-IT" altLang="it-IT"/>
           </a:p>
@@ -16987,7 +16987,7 @@
             </a:pPr>
             <a:r>
               <a:rPr lang="en-US" altLang="it-IT"/>
-              <a:t>last update: Sept  2024</a:t>
+              <a:t>last update: Oct 2026</a:t>
             </a:r>
             <a:endParaRPr lang="it-IT" altLang="it-IT"/>
           </a:p>
@@ -17208,7 +17208,7 @@
             </a:pPr>
             <a:r>
               <a:rPr lang="en-US" altLang="it-IT"/>
-              <a:t>last update: Sept  2024</a:t>
+              <a:t>last update: Oct 2026</a:t>
             </a:r>
             <a:endParaRPr lang="it-IT" altLang="it-IT" dirty="0"/>
           </a:p>
@@ -17325,7 +17325,7 @@
             </a:pPr>
             <a:r>
               <a:rPr lang="en-US" altLang="it-IT"/>
-              <a:t>last update: Sept  2024</a:t>
+              <a:t>last update: Oct 2026</a:t>
             </a:r>
             <a:endParaRPr lang="it-IT" altLang="it-IT"/>
           </a:p>
@@ -29584,7 +29584,7 @@
             </a:pPr>
             <a:r>
               <a:rPr lang="en-US" altLang="it-IT"/>
-              <a:t>last update: Sept  2024</a:t>
+              <a:t>last update: Oct 2026</a:t>
             </a:r>
             <a:endParaRPr lang="it-IT" altLang="it-IT"/>
           </a:p>
@@ -29873,7 +29873,7 @@
                 <a:rPr lang="pt-BR" altLang="it-IT" sz="1600" b="1" dirty="0">
                   <a:latin typeface="Courier New" panose="02070309020205020404" pitchFamily="49" charset="0"/>
                 </a:rPr>
-                <a:t>pc1[image]="kathara/base"</a:t>
+                <a:t>pc1[image]="kathara/core"</a:t>
               </a:r>
             </a:p>
             <a:p>
@@ -29938,7 +29938,7 @@
                 <a:rPr lang="pt-BR" altLang="it-IT" sz="1600" b="1" dirty="0">
                   <a:latin typeface="Courier New" panose="02070309020205020404" pitchFamily="49" charset="0"/>
                 </a:rPr>
-                <a:t>pc2[image]="kathara/base"</a:t>
+                <a:t>pc2[image]="kathara/core"</a:t>
               </a:r>
             </a:p>
             <a:p>
@@ -30015,7 +30015,7 @@
                 <a:rPr lang="pt-BR" altLang="it-IT" sz="1600" b="1" dirty="0">
                   <a:latin typeface="Courier New" panose="02070309020205020404" pitchFamily="49" charset="0"/>
                 </a:rPr>
-                <a:t>pc3[image]="kathara/base"</a:t>
+                <a:t>pc3[image]="kathara/core"</a:t>
               </a:r>
             </a:p>
             <a:p>
@@ -30092,7 +30092,7 @@
                 <a:rPr lang="pt-BR" altLang="it-IT" sz="1600" b="1" dirty="0">
                   <a:latin typeface="Courier New" panose="02070309020205020404" pitchFamily="49" charset="0"/>
                 </a:rPr>
-                <a:t>pc4[image]="kathara/base"</a:t>
+                <a:t>pc4[image]="kathara/core"</a:t>
               </a:r>
             </a:p>
             <a:p>
@@ -30625,7 +30625,7 @@
                 <a:rPr lang="pt-BR" altLang="it-IT" sz="1600" b="1" dirty="0">
                   <a:latin typeface="Courier New" panose="02070309020205020404" pitchFamily="49" charset="0"/>
                 </a:rPr>
-                <a:t>b1[image]="kathara/base"</a:t>
+                <a:t>b1[image]="kathara/core"</a:t>
               </a:r>
             </a:p>
             <a:p>
@@ -31031,7 +31031,7 @@
             </a:pPr>
             <a:r>
               <a:rPr lang="en-US" altLang="it-IT"/>
-              <a:t>last update: Sept  2024</a:t>
+              <a:t>last update: Oct 2026</a:t>
             </a:r>
             <a:endParaRPr lang="it-IT" altLang="it-IT"/>
           </a:p>
@@ -31187,7 +31187,7 @@
             </a:pPr>
             <a:r>
               <a:rPr lang="en-US" altLang="it-IT"/>
-              <a:t>last update: Sept  2024</a:t>
+              <a:t>last update: Oct 2026</a:t>
             </a:r>
             <a:endParaRPr lang="it-IT" altLang="it-IT" dirty="0"/>
           </a:p>
@@ -32387,7 +32387,7 @@
             </a:pPr>
             <a:r>
               <a:rPr lang="en-US" altLang="it-IT"/>
-              <a:t>last update: Sept  2024</a:t>
+              <a:t>last update: Oct 2026</a:t>
             </a:r>
             <a:endParaRPr lang="it-IT" altLang="it-IT"/>
           </a:p>
@@ -32549,7 +32549,7 @@
             </a:pPr>
             <a:r>
               <a:rPr lang="en-US" altLang="it-IT"/>
-              <a:t>last update: Sept  2024</a:t>
+              <a:t>last update: Oct 2026</a:t>
             </a:r>
             <a:endParaRPr lang="it-IT" altLang="it-IT"/>
           </a:p>
@@ -33742,7 +33742,7 @@
             </a:pPr>
             <a:r>
               <a:rPr lang="en-US" altLang="it-IT"/>
-              <a:t>last update: Sept  2024</a:t>
+              <a:t>last update: Oct 2026</a:t>
             </a:r>
             <a:endParaRPr lang="it-IT" altLang="it-IT"/>
           </a:p>
